--- a/recording_workspace/UC2_Propensity_To_Pay/Deliverables/1_Input/input 4 - summary deck template.pptx
+++ b/recording_workspace/UC2_Propensity_To_Pay/Deliverables/1_Input/input 4 - summary deck template.pptx
@@ -4369,7 +4369,7 @@
                   <a:srgbClr val="C25B12"/>
                 </a:solidFill>
               </a:rPr>
-              <a:t>Insert chart: 3_Intermediate / artifact 7 - evaluation charts / calibration.png</a:t>
+              <a:t>Insert chart: 3_Intermediate / artifact 7 - charts / 07_calibration.png</a:t>
             </a:r>
           </a:p>
         </p:txBody>

--- a/recording_workspace/UC2_Propensity_To_Pay/Deliverables/1_Input/input 4 - summary deck template.pptx
+++ b/recording_workspace/UC2_Propensity_To_Pay/Deliverables/1_Input/input 4 - summary deck template.pptx
@@ -3152,7 +3152,7 @@
         </p:spPr>
         <p:txBody>
           <a:bodyPr wrap="square">
-            <a:spAutoFit/>
+            <a:noAutofit/>
           </a:bodyPr>
           <a:lstStyle/>
           <a:p>
@@ -3191,7 +3191,7 @@
         </p:spPr>
         <p:txBody>
           <a:bodyPr wrap="square">
-            <a:spAutoFit/>
+            <a:noAutofit/>
           </a:bodyPr>
           <a:lstStyle/>
           <a:p>
@@ -3230,7 +3230,7 @@
         </p:spPr>
         <p:txBody>
           <a:bodyPr wrap="square">
-            <a:spAutoFit/>
+            <a:noAutofit/>
           </a:bodyPr>
           <a:lstStyle/>
           <a:p>
@@ -3330,7 +3330,7 @@
         </p:spPr>
         <p:txBody>
           <a:bodyPr wrap="square">
-            <a:spAutoFit/>
+            <a:noAutofit/>
           </a:bodyPr>
           <a:lstStyle/>
           <a:p>
@@ -3369,7 +3369,7 @@
         </p:spPr>
         <p:txBody>
           <a:bodyPr wrap="square">
-            <a:spAutoFit/>
+            <a:noAutofit/>
           </a:bodyPr>
           <a:lstStyle/>
           <a:p>
@@ -3408,7 +3408,7 @@
         </p:spPr>
         <p:txBody>
           <a:bodyPr wrap="square">
-            <a:spAutoFit/>
+            <a:noAutofit/>
           </a:bodyPr>
           <a:lstStyle/>
           <a:p>
@@ -3447,7 +3447,7 @@
         </p:spPr>
         <p:txBody>
           <a:bodyPr wrap="square">
-            <a:spAutoFit/>
+            <a:noAutofit/>
           </a:bodyPr>
           <a:lstStyle/>
           <a:p>
@@ -3674,7 +3674,7 @@
         </p:spPr>
         <p:txBody>
           <a:bodyPr wrap="square">
-            <a:spAutoFit/>
+            <a:noAutofit/>
           </a:bodyPr>
           <a:lstStyle/>
           <a:p>
@@ -3713,7 +3713,7 @@
         </p:spPr>
         <p:txBody>
           <a:bodyPr wrap="square">
-            <a:spAutoFit/>
+            <a:noAutofit/>
           </a:bodyPr>
           <a:lstStyle/>
           <a:p>
@@ -3752,7 +3752,7 @@
         </p:spPr>
         <p:txBody>
           <a:bodyPr wrap="square">
-            <a:spAutoFit/>
+            <a:noAutofit/>
           </a:bodyPr>
           <a:lstStyle/>
           <a:p>
@@ -3782,7 +3782,7 @@
         <p:spPr>
           <a:xfrm>
             <a:off x="548640" y="1280160"/>
-            <a:ext cx="3474720" cy="1417320"/>
+            <a:ext cx="3749039" cy="1417320"/>
           </a:xfrm>
           <a:prstGeom prst="roundRect">
             <a:avLst>
@@ -3827,7 +3827,7 @@
         <p:spPr>
           <a:xfrm>
             <a:off x="731520" y="1389888"/>
-            <a:ext cx="3108960" cy="365760"/>
+            <a:ext cx="3383280" cy="365760"/>
           </a:xfrm>
           <a:prstGeom prst="rect">
             <a:avLst/>
@@ -3836,7 +3836,7 @@
         </p:spPr>
         <p:txBody>
           <a:bodyPr wrap="square">
-            <a:spAutoFit/>
+            <a:noAutofit/>
           </a:bodyPr>
           <a:lstStyle/>
           <a:p>
@@ -3865,8 +3865,8 @@
         </p:nvSpPr>
         <p:spPr>
           <a:xfrm>
-            <a:off x="731520" y="1691640"/>
-            <a:ext cx="3108960" cy="548640"/>
+            <a:off x="731520" y="1709928"/>
+            <a:ext cx="3383280" cy="502920"/>
           </a:xfrm>
           <a:prstGeom prst="rect">
             <a:avLst/>
@@ -3874,8 +3874,8 @@
           <a:noFill/>
         </p:spPr>
         <p:txBody>
-          <a:bodyPr wrap="square">
-            <a:spAutoFit/>
+          <a:bodyPr wrap="none">
+            <a:noAutofit/>
           </a:bodyPr>
           <a:lstStyle/>
           <a:p>
@@ -3885,7 +3885,7 @@
               </a:spcAft>
             </a:pPr>
             <a:r>
-              <a:rPr sz="2400" b="1">
+              <a:rPr sz="2200" b="1">
                 <a:solidFill>
                   <a:srgbClr val="C25B12"/>
                 </a:solidFill>
@@ -3905,7 +3905,7 @@
         <p:spPr>
           <a:xfrm>
             <a:off x="731520" y="2267712"/>
-            <a:ext cx="3108960" cy="365760"/>
+            <a:ext cx="3383280" cy="365760"/>
           </a:xfrm>
           <a:prstGeom prst="rect">
             <a:avLst/>
@@ -3914,7 +3914,7 @@
         </p:spPr>
         <p:txBody>
           <a:bodyPr wrap="square">
-            <a:spAutoFit/>
+            <a:noAutofit/>
           </a:bodyPr>
           <a:lstStyle/>
           <a:p>
@@ -3944,7 +3944,7 @@
         <p:spPr>
           <a:xfrm>
             <a:off x="548640" y="2880360"/>
-            <a:ext cx="3474720" cy="1417320"/>
+            <a:ext cx="3749039" cy="1417320"/>
           </a:xfrm>
           <a:prstGeom prst="roundRect">
             <a:avLst>
@@ -3989,7 +3989,7 @@
         <p:spPr>
           <a:xfrm>
             <a:off x="731520" y="2990088"/>
-            <a:ext cx="3108960" cy="365760"/>
+            <a:ext cx="3383280" cy="365760"/>
           </a:xfrm>
           <a:prstGeom prst="rect">
             <a:avLst/>
@@ -3998,7 +3998,7 @@
         </p:spPr>
         <p:txBody>
           <a:bodyPr wrap="square">
-            <a:spAutoFit/>
+            <a:noAutofit/>
           </a:bodyPr>
           <a:lstStyle/>
           <a:p>
@@ -4014,7 +4014,7 @@
                 </a:solidFill>
                 <a:latin typeface="Calibri"/>
               </a:rPr>
-              <a:t>PR-AUC</a:t>
+              <a:t>PR-AUC: model vs baseline</a:t>
             </a:r>
           </a:p>
         </p:txBody>
@@ -4027,8 +4027,8 @@
         </p:nvSpPr>
         <p:spPr>
           <a:xfrm>
-            <a:off x="731520" y="3291840"/>
-            <a:ext cx="3108960" cy="548640"/>
+            <a:off x="731520" y="3310128"/>
+            <a:ext cx="3383280" cy="502920"/>
           </a:xfrm>
           <a:prstGeom prst="rect">
             <a:avLst/>
@@ -4036,8 +4036,8 @@
           <a:noFill/>
         </p:spPr>
         <p:txBody>
-          <a:bodyPr wrap="square">
-            <a:spAutoFit/>
+          <a:bodyPr wrap="none">
+            <a:noAutofit/>
           </a:bodyPr>
           <a:lstStyle/>
           <a:p>
@@ -4047,7 +4047,7 @@
               </a:spcAft>
             </a:pPr>
             <a:r>
-              <a:rPr sz="2400" b="1">
+              <a:rPr sz="2200" b="1">
                 <a:solidFill>
                   <a:srgbClr val="C25B12"/>
                 </a:solidFill>
@@ -4056,31 +4056,22 @@
               <a:t>[   ]</a:t>
             </a:r>
             <a:r>
-              <a:rPr sz="2400" b="0">
+              <a:rPr sz="2200" b="0">
                 <a:solidFill>
                   <a:srgbClr val="262B33"/>
                 </a:solidFill>
                 <a:latin typeface="Calibri"/>
               </a:rPr>
-              <a:t>  vs </a:t>
-            </a:r>
-            <a:r>
-              <a:rPr sz="2400" b="1">
+              <a:t>  vs  </a:t>
+            </a:r>
+            <a:r>
+              <a:rPr sz="2200" b="1">
                 <a:solidFill>
                   <a:srgbClr val="C25B12"/>
                 </a:solidFill>
                 <a:latin typeface="Calibri"/>
               </a:rPr>
               <a:t>[   ]</a:t>
-            </a:r>
-            <a:r>
-              <a:rPr sz="2400" b="0">
-                <a:solidFill>
-                  <a:srgbClr val="262B33"/>
-                </a:solidFill>
-                <a:latin typeface="Calibri"/>
-              </a:rPr>
-              <a:t> baseline</a:t>
             </a:r>
           </a:p>
         </p:txBody>
@@ -4094,7 +4085,7 @@
         <p:spPr>
           <a:xfrm>
             <a:off x="731520" y="3867912"/>
-            <a:ext cx="3108960" cy="365760"/>
+            <a:ext cx="3383280" cy="365760"/>
           </a:xfrm>
           <a:prstGeom prst="rect">
             <a:avLst/>
@@ -4103,7 +4094,7 @@
         </p:spPr>
         <p:txBody>
           <a:bodyPr wrap="square">
-            <a:spAutoFit/>
+            <a:noAutofit/>
           </a:bodyPr>
           <a:lstStyle/>
           <a:p>
@@ -4119,7 +4110,7 @@
                 </a:solidFill>
                 <a:latin typeface="Calibri"/>
               </a:rPr>
-              <a:t>logistic regression</a:t>
+              <a:t>logistic regression baseline</a:t>
             </a:r>
           </a:p>
         </p:txBody>
@@ -4133,7 +4124,7 @@
         <p:spPr>
           <a:xfrm>
             <a:off x="548640" y="4480560"/>
-            <a:ext cx="3474720" cy="1417320"/>
+            <a:ext cx="3749039" cy="1417320"/>
           </a:xfrm>
           <a:prstGeom prst="roundRect">
             <a:avLst>
@@ -4178,7 +4169,7 @@
         <p:spPr>
           <a:xfrm>
             <a:off x="731520" y="4590288"/>
-            <a:ext cx="3108960" cy="365760"/>
+            <a:ext cx="3383280" cy="365760"/>
           </a:xfrm>
           <a:prstGeom prst="rect">
             <a:avLst/>
@@ -4187,7 +4178,7 @@
         </p:spPr>
         <p:txBody>
           <a:bodyPr wrap="square">
-            <a:spAutoFit/>
+            <a:noAutofit/>
           </a:bodyPr>
           <a:lstStyle/>
           <a:p>
@@ -4203,7 +4194,7 @@
                 </a:solidFill>
                 <a:latin typeface="Calibri"/>
               </a:rPr>
-              <a:t>Predicted vs actual pay rate</a:t>
+              <a:t>Pay rate (%): raw → calibrated vs actual</a:t>
             </a:r>
           </a:p>
         </p:txBody>
@@ -4216,8 +4207,8 @@
         </p:nvSpPr>
         <p:spPr>
           <a:xfrm>
-            <a:off x="731520" y="4892040"/>
-            <a:ext cx="3108960" cy="548640"/>
+            <a:off x="731520" y="4910328"/>
+            <a:ext cx="3383280" cy="502920"/>
           </a:xfrm>
           <a:prstGeom prst="rect">
             <a:avLst/>
@@ -4225,8 +4216,8 @@
           <a:noFill/>
         </p:spPr>
         <p:txBody>
-          <a:bodyPr wrap="square">
-            <a:spAutoFit/>
+          <a:bodyPr wrap="none">
+            <a:noAutofit/>
           </a:bodyPr>
           <a:lstStyle/>
           <a:p>
@@ -4242,7 +4233,7 @@
                 </a:solidFill>
                 <a:latin typeface="Calibri"/>
               </a:rPr>
-              <a:t>[   ]%</a:t>
+              <a:t>[   ]</a:t>
             </a:r>
             <a:r>
               <a:rPr sz="2000" b="0">
@@ -4260,7 +4251,7 @@
                 </a:solidFill>
                 <a:latin typeface="Calibri"/>
               </a:rPr>
-              <a:t>[   ]%</a:t>
+              <a:t>[   ]</a:t>
             </a:r>
             <a:r>
               <a:rPr sz="2000" b="0">
@@ -4269,7 +4260,7 @@
                 </a:solidFill>
                 <a:latin typeface="Calibri"/>
               </a:rPr>
-              <a:t> vs </a:t>
+              <a:t>  vs  </a:t>
             </a:r>
             <a:r>
               <a:rPr sz="2000" b="1">
@@ -4278,7 +4269,7 @@
                 </a:solidFill>
                 <a:latin typeface="Calibri"/>
               </a:rPr>
-              <a:t>[   ]%</a:t>
+              <a:t>[   ]</a:t>
             </a:r>
           </a:p>
         </p:txBody>
@@ -4292,7 +4283,7 @@
         <p:spPr>
           <a:xfrm>
             <a:off x="731520" y="5468112"/>
-            <a:ext cx="3108960" cy="365760"/>
+            <a:ext cx="3383280" cy="365760"/>
           </a:xfrm>
           <a:prstGeom prst="rect">
             <a:avLst/>
@@ -4301,7 +4292,7 @@
         </p:spPr>
         <p:txBody>
           <a:bodyPr wrap="square">
-            <a:spAutoFit/>
+            <a:noAutofit/>
           </a:bodyPr>
           <a:lstStyle/>
           <a:p>
@@ -4317,7 +4308,7 @@
                 </a:solidFill>
                 <a:latin typeface="Calibri"/>
               </a:rPr>
-              <a:t>raw → calibrated vs actual</a:t>
+              <a:t>June predictions vs actual</a:t>
             </a:r>
           </a:p>
         </p:txBody>
@@ -4330,8 +4321,8 @@
         </p:nvSpPr>
         <p:spPr>
           <a:xfrm>
-            <a:off x="4389120" y="1280160"/>
-            <a:ext cx="7223760" cy="4617720"/>
+            <a:off x="4572000" y="1280160"/>
+            <a:ext cx="7040880" cy="4617720"/>
           </a:xfrm>
           <a:prstGeom prst="rect">
             <a:avLst/>
@@ -4453,7 +4444,7 @@
         </p:spPr>
         <p:txBody>
           <a:bodyPr wrap="square">
-            <a:spAutoFit/>
+            <a:noAutofit/>
           </a:bodyPr>
           <a:lstStyle/>
           <a:p>
@@ -4492,7 +4483,7 @@
         </p:spPr>
         <p:txBody>
           <a:bodyPr wrap="square">
-            <a:spAutoFit/>
+            <a:noAutofit/>
           </a:bodyPr>
           <a:lstStyle/>
           <a:p>
@@ -4531,7 +4522,7 @@
         </p:spPr>
         <p:txBody>
           <a:bodyPr wrap="square">
-            <a:spAutoFit/>
+            <a:noAutofit/>
           </a:bodyPr>
           <a:lstStyle/>
           <a:p>
@@ -4561,7 +4552,7 @@
         <p:spPr>
           <a:xfrm>
             <a:off x="548640" y="1280160"/>
-            <a:ext cx="3474720" cy="1417320"/>
+            <a:ext cx="3749039" cy="1417320"/>
           </a:xfrm>
           <a:prstGeom prst="roundRect">
             <a:avLst>
@@ -4606,7 +4597,7 @@
         <p:spPr>
           <a:xfrm>
             <a:off x="731520" y="1389888"/>
-            <a:ext cx="3108960" cy="365760"/>
+            <a:ext cx="3383280" cy="365760"/>
           </a:xfrm>
           <a:prstGeom prst="rect">
             <a:avLst/>
@@ -4615,7 +4606,7 @@
         </p:spPr>
         <p:txBody>
           <a:bodyPr wrap="square">
-            <a:spAutoFit/>
+            <a:noAutofit/>
           </a:bodyPr>
           <a:lstStyle/>
           <a:p>
@@ -4631,7 +4622,7 @@
                 </a:solidFill>
                 <a:latin typeface="Calibri"/>
               </a:rPr>
-              <a:t>Unpaid amount covered</a:t>
+              <a:t>Unpaid covered (%): model vs DPD rule</a:t>
             </a:r>
           </a:p>
         </p:txBody>
@@ -4644,8 +4635,8 @@
         </p:nvSpPr>
         <p:spPr>
           <a:xfrm>
-            <a:off x="731520" y="1691640"/>
-            <a:ext cx="3108960" cy="548640"/>
+            <a:off x="731520" y="1709928"/>
+            <a:ext cx="3383280" cy="502920"/>
           </a:xfrm>
           <a:prstGeom prst="rect">
             <a:avLst/>
@@ -4653,8 +4644,8 @@
           <a:noFill/>
         </p:spPr>
         <p:txBody>
-          <a:bodyPr wrap="square">
-            <a:spAutoFit/>
+          <a:bodyPr wrap="none">
+            <a:noAutofit/>
           </a:bodyPr>
           <a:lstStyle/>
           <a:p>
@@ -4664,31 +4655,31 @@
               </a:spcAft>
             </a:pPr>
             <a:r>
-              <a:rPr sz="2400" b="1">
+              <a:rPr sz="2200" b="1">
                 <a:solidFill>
                   <a:srgbClr val="C25B12"/>
                 </a:solidFill>
                 <a:latin typeface="Calibri"/>
               </a:rPr>
-              <a:t>[   ]%</a:t>
-            </a:r>
-            <a:r>
-              <a:rPr sz="2400" b="0">
+              <a:t>[   ]</a:t>
+            </a:r>
+            <a:r>
+              <a:rPr sz="2200" b="0">
                 <a:solidFill>
                   <a:srgbClr val="262B33"/>
                 </a:solidFill>
                 <a:latin typeface="Calibri"/>
               </a:rPr>
-              <a:t> vs </a:t>
-            </a:r>
-            <a:r>
-              <a:rPr sz="2400" b="1">
+              <a:t>  vs  </a:t>
+            </a:r>
+            <a:r>
+              <a:rPr sz="2200" b="1">
                 <a:solidFill>
                   <a:srgbClr val="C25B12"/>
                 </a:solidFill>
                 <a:latin typeface="Calibri"/>
               </a:rPr>
-              <a:t>[   ]%</a:t>
+              <a:t>[   ]</a:t>
             </a:r>
           </a:p>
         </p:txBody>
@@ -4702,7 +4693,7 @@
         <p:spPr>
           <a:xfrm>
             <a:off x="731520" y="2267712"/>
-            <a:ext cx="3108960" cy="365760"/>
+            <a:ext cx="3383280" cy="365760"/>
           </a:xfrm>
           <a:prstGeom prst="rect">
             <a:avLst/>
@@ -4711,7 +4702,7 @@
         </p:spPr>
         <p:txBody>
           <a:bodyPr wrap="square">
-            <a:spAutoFit/>
+            <a:noAutofit/>
           </a:bodyPr>
           <a:lstStyle/>
           <a:p>
@@ -4741,7 +4732,7 @@
         <p:spPr>
           <a:xfrm>
             <a:off x="548640" y="2880360"/>
-            <a:ext cx="3474720" cy="1417320"/>
+            <a:ext cx="3749039" cy="1417320"/>
           </a:xfrm>
           <a:prstGeom prst="roundRect">
             <a:avLst>
@@ -4786,7 +4777,7 @@
         <p:spPr>
           <a:xfrm>
             <a:off x="731520" y="2990088"/>
-            <a:ext cx="3108960" cy="365760"/>
+            <a:ext cx="3383280" cy="365760"/>
           </a:xfrm>
           <a:prstGeom prst="rect">
             <a:avLst/>
@@ -4795,7 +4786,7 @@
         </p:spPr>
         <p:txBody>
           <a:bodyPr wrap="square">
-            <a:spAutoFit/>
+            <a:noAutofit/>
           </a:bodyPr>
           <a:lstStyle/>
           <a:p>
@@ -4824,8 +4815,8 @@
         </p:nvSpPr>
         <p:spPr>
           <a:xfrm>
-            <a:off x="731520" y="3291840"/>
-            <a:ext cx="3108960" cy="548640"/>
+            <a:off x="731520" y="3310128"/>
+            <a:ext cx="3383280" cy="502920"/>
           </a:xfrm>
           <a:prstGeom prst="rect">
             <a:avLst/>
@@ -4833,8 +4824,8 @@
           <a:noFill/>
         </p:spPr>
         <p:txBody>
-          <a:bodyPr wrap="square">
-            <a:spAutoFit/>
+          <a:bodyPr wrap="none">
+            <a:noAutofit/>
           </a:bodyPr>
           <a:lstStyle/>
           <a:p>
@@ -4844,7 +4835,7 @@
               </a:spcAft>
             </a:pPr>
             <a:r>
-              <a:rPr sz="2400" b="1">
+              <a:rPr sz="2200" b="1">
                 <a:solidFill>
                   <a:srgbClr val="C25B12"/>
                 </a:solidFill>
@@ -4853,16 +4844,16 @@
               <a:t>[   ]</a:t>
             </a:r>
             <a:r>
-              <a:rPr sz="2400" b="0">
+              <a:rPr sz="2200" b="0">
                 <a:solidFill>
                   <a:srgbClr val="262B33"/>
                 </a:solidFill>
                 <a:latin typeface="Calibri"/>
               </a:rPr>
-              <a:t> of </a:t>
-            </a:r>
-            <a:r>
-              <a:rPr sz="2400" b="1">
+              <a:t>  of  </a:t>
+            </a:r>
+            <a:r>
+              <a:rPr sz="2200" b="1">
                 <a:solidFill>
                   <a:srgbClr val="C25B12"/>
                 </a:solidFill>
@@ -4882,7 +4873,7 @@
         <p:spPr>
           <a:xfrm>
             <a:off x="731520" y="3867912"/>
-            <a:ext cx="3108960" cy="365760"/>
+            <a:ext cx="3383280" cy="365760"/>
           </a:xfrm>
           <a:prstGeom prst="rect">
             <a:avLst/>
@@ -4891,7 +4882,7 @@
         </p:spPr>
         <p:txBody>
           <a:bodyPr wrap="square">
-            <a:spAutoFit/>
+            <a:noAutofit/>
           </a:bodyPr>
           <a:lstStyle/>
           <a:p>
@@ -4921,7 +4912,7 @@
         <p:spPr>
           <a:xfrm>
             <a:off x="548640" y="4480560"/>
-            <a:ext cx="3474720" cy="1417320"/>
+            <a:ext cx="3749039" cy="1417320"/>
           </a:xfrm>
           <a:prstGeom prst="roundRect">
             <a:avLst>
@@ -4966,7 +4957,7 @@
         <p:spPr>
           <a:xfrm>
             <a:off x="731520" y="4590288"/>
-            <a:ext cx="3108960" cy="365760"/>
+            <a:ext cx="3383280" cy="365760"/>
           </a:xfrm>
           <a:prstGeom prst="rect">
             <a:avLst/>
@@ -4975,7 +4966,7 @@
         </p:spPr>
         <p:txBody>
           <a:bodyPr wrap="square">
-            <a:spAutoFit/>
+            <a:noAutofit/>
           </a:bodyPr>
           <a:lstStyle/>
           <a:p>
@@ -4991,7 +4982,7 @@
                 </a:solidFill>
                 <a:latin typeface="Calibri"/>
               </a:rPr>
-              <a:t>Specialist team</a:t>
+              <a:t>Specialist team (accounts)</a:t>
             </a:r>
           </a:p>
         </p:txBody>
@@ -5004,8 +4995,8 @@
         </p:nvSpPr>
         <p:spPr>
           <a:xfrm>
-            <a:off x="731520" y="4892040"/>
-            <a:ext cx="3108960" cy="548640"/>
+            <a:off x="731520" y="4910328"/>
+            <a:ext cx="3383280" cy="502920"/>
           </a:xfrm>
           <a:prstGeom prst="rect">
             <a:avLst/>
@@ -5013,8 +5004,8 @@
           <a:noFill/>
         </p:spPr>
         <p:txBody>
-          <a:bodyPr wrap="square">
-            <a:spAutoFit/>
+          <a:bodyPr wrap="none">
+            <a:noAutofit/>
           </a:bodyPr>
           <a:lstStyle/>
           <a:p>
@@ -5024,22 +5015,13 @@
               </a:spcAft>
             </a:pPr>
             <a:r>
-              <a:rPr sz="2400" b="1">
+              <a:rPr sz="2200" b="1">
                 <a:solidFill>
                   <a:srgbClr val="C25B12"/>
                 </a:solidFill>
                 <a:latin typeface="Calibri"/>
               </a:rPr>
               <a:t>[   ]</a:t>
-            </a:r>
-            <a:r>
-              <a:rPr sz="2400" b="0">
-                <a:solidFill>
-                  <a:srgbClr val="262B33"/>
-                </a:solidFill>
-                <a:latin typeface="Calibri"/>
-              </a:rPr>
-              <a:t> accounts</a:t>
             </a:r>
           </a:p>
         </p:txBody>
@@ -5053,7 +5035,7 @@
         <p:spPr>
           <a:xfrm>
             <a:off x="731520" y="5468112"/>
-            <a:ext cx="3108960" cy="365760"/>
+            <a:ext cx="3383280" cy="365760"/>
           </a:xfrm>
           <a:prstGeom prst="rect">
             <a:avLst/>
@@ -5062,7 +5044,7 @@
         </p:spPr>
         <p:txBody>
           <a:bodyPr wrap="square">
-            <a:spAutoFit/>
+            <a:noAutofit/>
           </a:bodyPr>
           <a:lstStyle/>
           <a:p>
@@ -5091,8 +5073,8 @@
         </p:nvSpPr>
         <p:spPr>
           <a:xfrm>
-            <a:off x="4389120" y="1234440"/>
-            <a:ext cx="7223760" cy="457200"/>
+            <a:off x="4572000" y="1234440"/>
+            <a:ext cx="7040880" cy="457200"/>
           </a:xfrm>
           <a:prstGeom prst="rect">
             <a:avLst/>
@@ -5101,7 +5083,7 @@
         </p:spPr>
         <p:txBody>
           <a:bodyPr wrap="square">
-            <a:spAutoFit/>
+            <a:noAutofit/>
           </a:bodyPr>
           <a:lstStyle/>
           <a:p>
@@ -5117,7 +5099,7 @@
                 </a:solidFill>
                 <a:latin typeface="Calibri"/>
               </a:rPr>
-              <a:t>What drives payment</a:t>
+              <a:t>What drives payment (SHAP)</a:t>
             </a:r>
           </a:p>
         </p:txBody>
@@ -5130,8 +5112,8 @@
         </p:nvSpPr>
         <p:spPr>
           <a:xfrm>
-            <a:off x="4389120" y="1691640"/>
-            <a:ext cx="7223760" cy="2194560"/>
+            <a:off x="4572000" y="1691640"/>
+            <a:ext cx="7040880" cy="2194560"/>
           </a:xfrm>
           <a:prstGeom prst="rect">
             <a:avLst/>
@@ -5140,7 +5122,7 @@
         </p:spPr>
         <p:txBody>
           <a:bodyPr wrap="square">
-            <a:spAutoFit/>
+            <a:noAutofit/>
           </a:bodyPr>
           <a:lstStyle/>
           <a:p>
@@ -5159,13 +5141,13 @@
               <a:t>•  </a:t>
             </a:r>
             <a:r>
-              <a:rPr sz="1600" b="1">
-                <a:solidFill>
-                  <a:srgbClr val="C25B12"/>
-                </a:solidFill>
-                <a:latin typeface="Calibri"/>
-              </a:rPr>
-              <a:t>[Driver 1 from SHAP]</a:t>
+              <a:rPr sz="1600" b="0">
+                <a:solidFill>
+                  <a:srgbClr val="262B33"/>
+                </a:solidFill>
+                <a:latin typeface="Calibri"/>
+              </a:rPr>
+              <a:t>Payment history: on-time ratio and prior delinquencies</a:t>
             </a:r>
           </a:p>
           <a:p>
@@ -5184,13 +5166,13 @@
               <a:t>•  </a:t>
             </a:r>
             <a:r>
-              <a:rPr sz="1600" b="1">
-                <a:solidFill>
-                  <a:srgbClr val="C25B12"/>
-                </a:solidFill>
-                <a:latin typeface="Calibri"/>
-              </a:rPr>
-              <a:t>[Driver 2 from SHAP]</a:t>
+              <a:rPr sz="1600" b="0">
+                <a:solidFill>
+                  <a:srgbClr val="262B33"/>
+                </a:solidFill>
+                <a:latin typeface="Calibri"/>
+              </a:rPr>
+              <a:t>Days past due: cure rates collapse after 30 days</a:t>
             </a:r>
           </a:p>
           <a:p>
@@ -5209,13 +5191,13 @@
               <a:t>•  </a:t>
             </a:r>
             <a:r>
-              <a:rPr sz="1600" b="1">
-                <a:solidFill>
-                  <a:srgbClr val="C25B12"/>
-                </a:solidFill>
-                <a:latin typeface="Calibri"/>
-              </a:rPr>
-              <a:t>[Driver 3 from SHAP]</a:t>
+              <a:rPr sz="1600" b="0">
+                <a:solidFill>
+                  <a:srgbClr val="262B33"/>
+                </a:solidFill>
+                <a:latin typeface="Calibri"/>
+              </a:rPr>
+              <a:t>First-week contact: reaching the customer and a promise to pay (worth less after broken promises)</a:t>
             </a:r>
           </a:p>
         </p:txBody>
@@ -5228,8 +5210,8 @@
         </p:nvSpPr>
         <p:spPr>
           <a:xfrm>
-            <a:off x="4389120" y="3840480"/>
-            <a:ext cx="7223760" cy="457200"/>
+            <a:off x="4572000" y="3840480"/>
+            <a:ext cx="7040880" cy="457200"/>
           </a:xfrm>
           <a:prstGeom prst="rect">
             <a:avLst/>
@@ -5238,7 +5220,7 @@
         </p:spPr>
         <p:txBody>
           <a:bodyPr wrap="square">
-            <a:spAutoFit/>
+            <a:noAutofit/>
           </a:bodyPr>
           <a:lstStyle/>
           <a:p>
@@ -5267,8 +5249,8 @@
         </p:nvSpPr>
         <p:spPr>
           <a:xfrm>
-            <a:off x="4389120" y="4297680"/>
-            <a:ext cx="7223760" cy="2011680"/>
+            <a:off x="4572000" y="4297680"/>
+            <a:ext cx="7040880" cy="2011680"/>
           </a:xfrm>
           <a:prstGeom prst="rect">
             <a:avLst/>
@@ -5277,7 +5259,7 @@
         </p:spPr>
         <p:txBody>
           <a:bodyPr wrap="square">
-            <a:spAutoFit/>
+            <a:noAutofit/>
           </a:bodyPr>
           <a:lstStyle/>
           <a:p>
